--- a/Figures/figure_04.pptx
+++ b/Figures/figure_04.pptx
@@ -115,7 +115,7 @@
 <file path=ppt/revisionInfo.xml><?xml version="1.0" encoding="utf-8"?>
 <p1510:revInfo xmlns:a="http://schemas.openxmlformats.org/drawingml/2006/main" xmlns:r="http://schemas.openxmlformats.org/officeDocument/2006/relationships" xmlns:p1510="http://schemas.microsoft.com/office/powerpoint/2015/10/main">
   <p1510:revLst>
-    <p1510:client id="{5D43B1FD-858F-475C-B266-63FB45020388}" v="7" dt="2025-07-01T18:51:29.047"/>
+    <p1510:client id="{38248757-9D5F-486A-82F6-E9A53BCBE0EC}" v="2" dt="2025-12-11T15:50:14.311"/>
   </p1510:revLst>
 </p1510:revInfo>
 </file>
@@ -123,36 +123,36 @@
 <file path=ppt/changesInfos/changesInfo1.xml><?xml version="1.0" encoding="utf-8"?>
 <pc:chgInfo xmlns:a="http://schemas.openxmlformats.org/drawingml/2006/main" xmlns:r="http://schemas.openxmlformats.org/officeDocument/2006/relationships" xmlns:ac="http://schemas.microsoft.com/office/drawing/2013/main/command" xmlns:pc="http://schemas.microsoft.com/office/powerpoint/2013/main/command">
   <pc:docChgLst>
-    <pc:chgData name="Gilbert, Neil" userId="37be9f5c-8f28-415b-96d6-624acf93bb3f" providerId="ADAL" clId="{E4DC28E1-2B7F-4A2D-B628-0A5234296B66}"/>
-    <pc:docChg chg="custSel modSld">
-      <pc:chgData name="Gilbert, Neil" userId="37be9f5c-8f28-415b-96d6-624acf93bb3f" providerId="ADAL" clId="{E4DC28E1-2B7F-4A2D-B628-0A5234296B66}" dt="2025-05-13T20:57:48.041" v="47" actId="207"/>
+    <pc:chgData name="Gilbert, Neil" userId="37be9f5c-8f28-415b-96d6-624acf93bb3f" providerId="ADAL" clId="{18ED56B6-1921-416C-9A28-3F6F3C8390B5}"/>
+    <pc:docChg chg="undo custSel modSld">
+      <pc:chgData name="Gilbert, Neil" userId="37be9f5c-8f28-415b-96d6-624acf93bb3f" providerId="ADAL" clId="{18ED56B6-1921-416C-9A28-3F6F3C8390B5}" dt="2025-12-11T15:50:35.321" v="16" actId="207"/>
       <pc:docMkLst>
         <pc:docMk/>
       </pc:docMkLst>
-      <pc:sldChg chg="addSp delSp modSp mod">
-        <pc:chgData name="Gilbert, Neil" userId="37be9f5c-8f28-415b-96d6-624acf93bb3f" providerId="ADAL" clId="{E4DC28E1-2B7F-4A2D-B628-0A5234296B66}" dt="2025-05-13T20:57:48.041" v="47" actId="207"/>
+      <pc:sldChg chg="addSp modSp mod">
+        <pc:chgData name="Gilbert, Neil" userId="37be9f5c-8f28-415b-96d6-624acf93bb3f" providerId="ADAL" clId="{18ED56B6-1921-416C-9A28-3F6F3C8390B5}" dt="2025-12-11T15:50:35.321" v="16" actId="207"/>
         <pc:sldMkLst>
           <pc:docMk/>
           <pc:sldMk cId="3411422184" sldId="256"/>
         </pc:sldMkLst>
-        <pc:spChg chg="mod ord">
-          <ac:chgData name="Gilbert, Neil" userId="37be9f5c-8f28-415b-96d6-624acf93bb3f" providerId="ADAL" clId="{E4DC28E1-2B7F-4A2D-B628-0A5234296B66}" dt="2025-05-13T20:57:10.626" v="40" actId="167"/>
+        <pc:spChg chg="add mod">
+          <ac:chgData name="Gilbert, Neil" userId="37be9f5c-8f28-415b-96d6-624acf93bb3f" providerId="ADAL" clId="{18ED56B6-1921-416C-9A28-3F6F3C8390B5}" dt="2025-12-11T15:50:04.627" v="12" actId="20577"/>
           <ac:spMkLst>
             <pc:docMk/>
             <pc:sldMk cId="3411422184" sldId="256"/>
-            <ac:spMk id="16" creationId="{8D5C18B7-1B00-AC44-6F31-D85289AE6910}"/>
+            <ac:spMk id="2" creationId="{8F4D1F6A-C21C-D925-F627-B3A4DAF69925}"/>
           </ac:spMkLst>
         </pc:spChg>
-        <pc:spChg chg="mod ord">
-          <ac:chgData name="Gilbert, Neil" userId="37be9f5c-8f28-415b-96d6-624acf93bb3f" providerId="ADAL" clId="{E4DC28E1-2B7F-4A2D-B628-0A5234296B66}" dt="2025-05-13T20:57:14.780" v="41" actId="167"/>
+        <pc:spChg chg="add mod">
+          <ac:chgData name="Gilbert, Neil" userId="37be9f5c-8f28-415b-96d6-624acf93bb3f" providerId="ADAL" clId="{18ED56B6-1921-416C-9A28-3F6F3C8390B5}" dt="2025-12-11T15:50:35.321" v="16" actId="207"/>
           <ac:spMkLst>
             <pc:docMk/>
             <pc:sldMk cId="3411422184" sldId="256"/>
-            <ac:spMk id="17" creationId="{7F3DF354-F6C1-F8E8-FB22-95A098F47E6C}"/>
+            <ac:spMk id="3" creationId="{D7CF51DF-0838-CE75-B163-8D2115511C37}"/>
           </ac:spMkLst>
         </pc:spChg>
         <pc:spChg chg="mod">
-          <ac:chgData name="Gilbert, Neil" userId="37be9f5c-8f28-415b-96d6-624acf93bb3f" providerId="ADAL" clId="{E4DC28E1-2B7F-4A2D-B628-0A5234296B66}" dt="2025-05-13T15:02:21.737" v="5" actId="1076"/>
+          <ac:chgData name="Gilbert, Neil" userId="37be9f5c-8f28-415b-96d6-624acf93bb3f" providerId="ADAL" clId="{18ED56B6-1921-416C-9A28-3F6F3C8390B5}" dt="2025-12-11T15:49:53.915" v="0" actId="1076"/>
           <ac:spMkLst>
             <pc:docMk/>
             <pc:sldMk cId="3411422184" sldId="256"/>
@@ -160,173 +160,13 @@
           </ac:spMkLst>
         </pc:spChg>
         <pc:spChg chg="mod">
-          <ac:chgData name="Gilbert, Neil" userId="37be9f5c-8f28-415b-96d6-624acf93bb3f" providerId="ADAL" clId="{E4DC28E1-2B7F-4A2D-B628-0A5234296B66}" dt="2025-05-13T15:02:27.743" v="6" actId="1076"/>
+          <ac:chgData name="Gilbert, Neil" userId="37be9f5c-8f28-415b-96d6-624acf93bb3f" providerId="ADAL" clId="{18ED56B6-1921-416C-9A28-3F6F3C8390B5}" dt="2025-12-11T15:50:11.940" v="13" actId="1076"/>
           <ac:spMkLst>
             <pc:docMk/>
             <pc:sldMk cId="3411422184" sldId="256"/>
             <ac:spMk id="23" creationId="{7E8F2D37-AF78-F99F-12B7-7E3311DF88A3}"/>
           </ac:spMkLst>
         </pc:spChg>
-        <pc:spChg chg="mod">
-          <ac:chgData name="Gilbert, Neil" userId="37be9f5c-8f28-415b-96d6-624acf93bb3f" providerId="ADAL" clId="{E4DC28E1-2B7F-4A2D-B628-0A5234296B66}" dt="2025-05-13T15:02:42.289" v="9" actId="1076"/>
-          <ac:spMkLst>
-            <pc:docMk/>
-            <pc:sldMk cId="3411422184" sldId="256"/>
-            <ac:spMk id="24" creationId="{565EB29B-2944-3376-1963-C13AD4A393A2}"/>
-          </ac:spMkLst>
-        </pc:spChg>
-        <pc:spChg chg="mod">
-          <ac:chgData name="Gilbert, Neil" userId="37be9f5c-8f28-415b-96d6-624acf93bb3f" providerId="ADAL" clId="{E4DC28E1-2B7F-4A2D-B628-0A5234296B66}" dt="2025-05-13T15:02:38.404" v="8" actId="1076"/>
-          <ac:spMkLst>
-            <pc:docMk/>
-            <pc:sldMk cId="3411422184" sldId="256"/>
-            <ac:spMk id="25" creationId="{0D5128A7-5675-D462-D8A6-29EA6D3F8432}"/>
-          </ac:spMkLst>
-        </pc:spChg>
-        <pc:spChg chg="mod">
-          <ac:chgData name="Gilbert, Neil" userId="37be9f5c-8f28-415b-96d6-624acf93bb3f" providerId="ADAL" clId="{E4DC28E1-2B7F-4A2D-B628-0A5234296B66}" dt="2025-05-13T15:11:02.638" v="33" actId="207"/>
-          <ac:spMkLst>
-            <pc:docMk/>
-            <pc:sldMk cId="3411422184" sldId="256"/>
-            <ac:spMk id="27" creationId="{DC55F93E-5955-C77F-20AF-0133385BC887}"/>
-          </ac:spMkLst>
-        </pc:spChg>
-        <pc:spChg chg="mod">
-          <ac:chgData name="Gilbert, Neil" userId="37be9f5c-8f28-415b-96d6-624acf93bb3f" providerId="ADAL" clId="{E4DC28E1-2B7F-4A2D-B628-0A5234296B66}" dt="2025-05-13T20:57:32.146" v="43" actId="1076"/>
-          <ac:spMkLst>
-            <pc:docMk/>
-            <pc:sldMk cId="3411422184" sldId="256"/>
-            <ac:spMk id="31" creationId="{AA41E60C-581A-B539-FE06-1EB1853AAD7C}"/>
-          </ac:spMkLst>
-        </pc:spChg>
-        <pc:spChg chg="mod">
-          <ac:chgData name="Gilbert, Neil" userId="37be9f5c-8f28-415b-96d6-624acf93bb3f" providerId="ADAL" clId="{E4DC28E1-2B7F-4A2D-B628-0A5234296B66}" dt="2025-05-13T20:57:48.041" v="47" actId="207"/>
-          <ac:spMkLst>
-            <pc:docMk/>
-            <pc:sldMk cId="3411422184" sldId="256"/>
-            <ac:spMk id="32" creationId="{7959AF91-E449-5AAA-AFCB-966F2A4ECCA8}"/>
-          </ac:spMkLst>
-        </pc:spChg>
-        <pc:spChg chg="mod">
-          <ac:chgData name="Gilbert, Neil" userId="37be9f5c-8f28-415b-96d6-624acf93bb3f" providerId="ADAL" clId="{E4DC28E1-2B7F-4A2D-B628-0A5234296B66}" dt="2025-05-13T20:57:22.949" v="42" actId="1076"/>
-          <ac:spMkLst>
-            <pc:docMk/>
-            <pc:sldMk cId="3411422184" sldId="256"/>
-            <ac:spMk id="33" creationId="{F0FB004E-AAB3-C478-27D2-D4CBDD4FBE01}"/>
-          </ac:spMkLst>
-        </pc:spChg>
-      </pc:sldChg>
-    </pc:docChg>
-  </pc:docChgLst>
-  <pc:docChgLst>
-    <pc:chgData name="Gilbert, Neil" userId="37be9f5c-8f28-415b-96d6-624acf93bb3f" providerId="ADAL" clId="{5D43B1FD-858F-475C-B266-63FB45020388}"/>
-    <pc:docChg chg="undo custSel modSld">
-      <pc:chgData name="Gilbert, Neil" userId="37be9f5c-8f28-415b-96d6-624acf93bb3f" providerId="ADAL" clId="{5D43B1FD-858F-475C-B266-63FB45020388}" dt="2025-07-01T18:52:07.804" v="128" actId="167"/>
-      <pc:docMkLst>
-        <pc:docMk/>
-      </pc:docMkLst>
-      <pc:sldChg chg="addSp delSp modSp mod">
-        <pc:chgData name="Gilbert, Neil" userId="37be9f5c-8f28-415b-96d6-624acf93bb3f" providerId="ADAL" clId="{5D43B1FD-858F-475C-B266-63FB45020388}" dt="2025-07-01T18:52:07.804" v="128" actId="167"/>
-        <pc:sldMkLst>
-          <pc:docMk/>
-          <pc:sldMk cId="3411422184" sldId="256"/>
-        </pc:sldMkLst>
-        <pc:spChg chg="add del mod">
-          <ac:chgData name="Gilbert, Neil" userId="37be9f5c-8f28-415b-96d6-624acf93bb3f" providerId="ADAL" clId="{5D43B1FD-858F-475C-B266-63FB45020388}" dt="2025-07-01T18:40:48.708" v="56" actId="478"/>
-          <ac:spMkLst>
-            <pc:docMk/>
-            <pc:sldMk cId="3411422184" sldId="256"/>
-            <ac:spMk id="5" creationId="{6D1C5A46-3C34-018B-FF29-CFEFDACBFFC1}"/>
-          </ac:spMkLst>
-        </pc:spChg>
-        <pc:spChg chg="add mod">
-          <ac:chgData name="Gilbert, Neil" userId="37be9f5c-8f28-415b-96d6-624acf93bb3f" providerId="ADAL" clId="{5D43B1FD-858F-475C-B266-63FB45020388}" dt="2025-07-01T18:51:14.826" v="121" actId="1076"/>
-          <ac:spMkLst>
-            <pc:docMk/>
-            <pc:sldMk cId="3411422184" sldId="256"/>
-            <ac:spMk id="6" creationId="{709202D5-C0C0-FB99-EE08-C858E942C32C}"/>
-          </ac:spMkLst>
-        </pc:spChg>
-        <pc:spChg chg="add mod">
-          <ac:chgData name="Gilbert, Neil" userId="37be9f5c-8f28-415b-96d6-624acf93bb3f" providerId="ADAL" clId="{5D43B1FD-858F-475C-B266-63FB45020388}" dt="2025-07-01T18:51:19.003" v="122" actId="1076"/>
-          <ac:spMkLst>
-            <pc:docMk/>
-            <pc:sldMk cId="3411422184" sldId="256"/>
-            <ac:spMk id="10" creationId="{CA5A5ED4-3C30-2148-6C6B-D7E69C06ED60}"/>
-          </ac:spMkLst>
-        </pc:spChg>
-        <pc:spChg chg="ord">
-          <ac:chgData name="Gilbert, Neil" userId="37be9f5c-8f28-415b-96d6-624acf93bb3f" providerId="ADAL" clId="{5D43B1FD-858F-475C-B266-63FB45020388}" dt="2025-07-01T18:52:05.115" v="127" actId="167"/>
-          <ac:spMkLst>
-            <pc:docMk/>
-            <pc:sldMk cId="3411422184" sldId="256"/>
-            <ac:spMk id="16" creationId="{8D5C18B7-1B00-AC44-6F31-D85289AE6910}"/>
-          </ac:spMkLst>
-        </pc:spChg>
-        <pc:spChg chg="ord">
-          <ac:chgData name="Gilbert, Neil" userId="37be9f5c-8f28-415b-96d6-624acf93bb3f" providerId="ADAL" clId="{5D43B1FD-858F-475C-B266-63FB45020388}" dt="2025-07-01T18:52:07.804" v="128" actId="167"/>
-          <ac:spMkLst>
-            <pc:docMk/>
-            <pc:sldMk cId="3411422184" sldId="256"/>
-            <ac:spMk id="17" creationId="{7F3DF354-F6C1-F8E8-FB22-95A098F47E6C}"/>
-          </ac:spMkLst>
-        </pc:spChg>
-        <pc:spChg chg="mod">
-          <ac:chgData name="Gilbert, Neil" userId="37be9f5c-8f28-415b-96d6-624acf93bb3f" providerId="ADAL" clId="{5D43B1FD-858F-475C-B266-63FB45020388}" dt="2025-07-01T18:49:49.951" v="108" actId="1076"/>
-          <ac:spMkLst>
-            <pc:docMk/>
-            <pc:sldMk cId="3411422184" sldId="256"/>
-            <ac:spMk id="25" creationId="{0D5128A7-5675-D462-D8A6-29EA6D3F8432}"/>
-          </ac:spMkLst>
-        </pc:spChg>
-        <pc:picChg chg="del">
-          <ac:chgData name="Gilbert, Neil" userId="37be9f5c-8f28-415b-96d6-624acf93bb3f" providerId="ADAL" clId="{5D43B1FD-858F-475C-B266-63FB45020388}" dt="2025-07-01T18:36:48.627" v="0" actId="478"/>
-          <ac:picMkLst>
-            <pc:docMk/>
-            <pc:sldMk cId="3411422184" sldId="256"/>
-            <ac:picMk id="3" creationId="{783BB44D-F64D-41DC-C512-5E83C0F59051}"/>
-          </ac:picMkLst>
-        </pc:picChg>
-        <pc:picChg chg="add del mod ord">
-          <ac:chgData name="Gilbert, Neil" userId="37be9f5c-8f28-415b-96d6-624acf93bb3f" providerId="ADAL" clId="{5D43B1FD-858F-475C-B266-63FB45020388}" dt="2025-07-01T18:49:31.892" v="103" actId="478"/>
-          <ac:picMkLst>
-            <pc:docMk/>
-            <pc:sldMk cId="3411422184" sldId="256"/>
-            <ac:picMk id="3" creationId="{BEACC303-8E8C-74AF-08B3-3181C38B505D}"/>
-          </ac:picMkLst>
-        </pc:picChg>
-        <pc:picChg chg="add del mod ord">
-          <ac:chgData name="Gilbert, Neil" userId="37be9f5c-8f28-415b-96d6-624acf93bb3f" providerId="ADAL" clId="{5D43B1FD-858F-475C-B266-63FB45020388}" dt="2025-07-01T18:40:42.609" v="51" actId="478"/>
-          <ac:picMkLst>
-            <pc:docMk/>
-            <pc:sldMk cId="3411422184" sldId="256"/>
-            <ac:picMk id="4" creationId="{1A6EA450-7485-45CC-255A-9288C72A52D2}"/>
-          </ac:picMkLst>
-        </pc:picChg>
-        <pc:picChg chg="add mod ord">
-          <ac:chgData name="Gilbert, Neil" userId="37be9f5c-8f28-415b-96d6-624acf93bb3f" providerId="ADAL" clId="{5D43B1FD-858F-475C-B266-63FB45020388}" dt="2025-07-01T18:49:43.855" v="107" actId="167"/>
-          <ac:picMkLst>
-            <pc:docMk/>
-            <pc:sldMk cId="3411422184" sldId="256"/>
-            <ac:picMk id="12" creationId="{2F0575EA-F876-B35B-FFDF-125758C2C97A}"/>
-          </ac:picMkLst>
-        </pc:picChg>
-        <pc:cxnChg chg="add mod">
-          <ac:chgData name="Gilbert, Neil" userId="37be9f5c-8f28-415b-96d6-624acf93bb3f" providerId="ADAL" clId="{5D43B1FD-858F-475C-B266-63FB45020388}" dt="2025-07-01T18:45:56.532" v="86" actId="692"/>
-          <ac:cxnSpMkLst>
-            <pc:docMk/>
-            <pc:sldMk cId="3411422184" sldId="256"/>
-            <ac:cxnSpMk id="8" creationId="{4348662E-1ED8-9654-EE9D-C4B498F7DDB8}"/>
-          </ac:cxnSpMkLst>
-        </pc:cxnChg>
-        <pc:cxnChg chg="add mod">
-          <ac:chgData name="Gilbert, Neil" userId="37be9f5c-8f28-415b-96d6-624acf93bb3f" providerId="ADAL" clId="{5D43B1FD-858F-475C-B266-63FB45020388}" dt="2025-07-01T18:51:42.838" v="126" actId="14100"/>
-          <ac:cxnSpMkLst>
-            <pc:docMk/>
-            <pc:sldMk cId="3411422184" sldId="256"/>
-            <ac:cxnSpMk id="13" creationId="{C7B3B9C4-D2F9-DD4F-E9F8-C2F0631851C4}"/>
-          </ac:cxnSpMkLst>
-        </pc:cxnChg>
       </pc:sldChg>
     </pc:docChg>
   </pc:docChgLst>
@@ -464,7 +304,7 @@
           <a:p>
             <a:fld id="{9C263D12-3D85-4112-B404-6DA9A76AD2B0}" type="datetimeFigureOut">
               <a:rPr lang="en-US" smtClean="0"/>
-              <a:t>7/1/2025</a:t>
+              <a:t>12/11/2025</a:t>
             </a:fld>
             <a:endParaRPr lang="en-US"/>
           </a:p>
@@ -634,7 +474,7 @@
           <a:p>
             <a:fld id="{9C263D12-3D85-4112-B404-6DA9A76AD2B0}" type="datetimeFigureOut">
               <a:rPr lang="en-US" smtClean="0"/>
-              <a:t>7/1/2025</a:t>
+              <a:t>12/11/2025</a:t>
             </a:fld>
             <a:endParaRPr lang="en-US"/>
           </a:p>
@@ -814,7 +654,7 @@
           <a:p>
             <a:fld id="{9C263D12-3D85-4112-B404-6DA9A76AD2B0}" type="datetimeFigureOut">
               <a:rPr lang="en-US" smtClean="0"/>
-              <a:t>7/1/2025</a:t>
+              <a:t>12/11/2025</a:t>
             </a:fld>
             <a:endParaRPr lang="en-US"/>
           </a:p>
@@ -984,7 +824,7 @@
           <a:p>
             <a:fld id="{9C263D12-3D85-4112-B404-6DA9A76AD2B0}" type="datetimeFigureOut">
               <a:rPr lang="en-US" smtClean="0"/>
-              <a:t>7/1/2025</a:t>
+              <a:t>12/11/2025</a:t>
             </a:fld>
             <a:endParaRPr lang="en-US"/>
           </a:p>
@@ -1230,7 +1070,7 @@
           <a:p>
             <a:fld id="{9C263D12-3D85-4112-B404-6DA9A76AD2B0}" type="datetimeFigureOut">
               <a:rPr lang="en-US" smtClean="0"/>
-              <a:t>7/1/2025</a:t>
+              <a:t>12/11/2025</a:t>
             </a:fld>
             <a:endParaRPr lang="en-US"/>
           </a:p>
@@ -1462,7 +1302,7 @@
           <a:p>
             <a:fld id="{9C263D12-3D85-4112-B404-6DA9A76AD2B0}" type="datetimeFigureOut">
               <a:rPr lang="en-US" smtClean="0"/>
-              <a:t>7/1/2025</a:t>
+              <a:t>12/11/2025</a:t>
             </a:fld>
             <a:endParaRPr lang="en-US"/>
           </a:p>
@@ -1829,7 +1669,7 @@
           <a:p>
             <a:fld id="{9C263D12-3D85-4112-B404-6DA9A76AD2B0}" type="datetimeFigureOut">
               <a:rPr lang="en-US" smtClean="0"/>
-              <a:t>7/1/2025</a:t>
+              <a:t>12/11/2025</a:t>
             </a:fld>
             <a:endParaRPr lang="en-US"/>
           </a:p>
@@ -1947,7 +1787,7 @@
           <a:p>
             <a:fld id="{9C263D12-3D85-4112-B404-6DA9A76AD2B0}" type="datetimeFigureOut">
               <a:rPr lang="en-US" smtClean="0"/>
-              <a:t>7/1/2025</a:t>
+              <a:t>12/11/2025</a:t>
             </a:fld>
             <a:endParaRPr lang="en-US"/>
           </a:p>
@@ -2042,7 +1882,7 @@
           <a:p>
             <a:fld id="{9C263D12-3D85-4112-B404-6DA9A76AD2B0}" type="datetimeFigureOut">
               <a:rPr lang="en-US" smtClean="0"/>
-              <a:t>7/1/2025</a:t>
+              <a:t>12/11/2025</a:t>
             </a:fld>
             <a:endParaRPr lang="en-US"/>
           </a:p>
@@ -2319,7 +2159,7 @@
           <a:p>
             <a:fld id="{9C263D12-3D85-4112-B404-6DA9A76AD2B0}" type="datetimeFigureOut">
               <a:rPr lang="en-US" smtClean="0"/>
-              <a:t>7/1/2025</a:t>
+              <a:t>12/11/2025</a:t>
             </a:fld>
             <a:endParaRPr lang="en-US"/>
           </a:p>
@@ -2576,7 +2416,7 @@
           <a:p>
             <a:fld id="{9C263D12-3D85-4112-B404-6DA9A76AD2B0}" type="datetimeFigureOut">
               <a:rPr lang="en-US" smtClean="0"/>
-              <a:t>7/1/2025</a:t>
+              <a:t>12/11/2025</a:t>
             </a:fld>
             <a:endParaRPr lang="en-US"/>
           </a:p>
@@ -2789,7 +2629,7 @@
           <a:p>
             <a:fld id="{9C263D12-3D85-4112-B404-6DA9A76AD2B0}" type="datetimeFigureOut">
               <a:rPr lang="en-US" smtClean="0"/>
-              <a:t>7/1/2025</a:t>
+              <a:t>12/11/2025</a:t>
             </a:fld>
             <a:endParaRPr lang="en-US"/>
           </a:p>
@@ -3502,7 +3342,7 @@
         </p:nvSpPr>
         <p:spPr>
           <a:xfrm>
-            <a:off x="1395412" y="506568"/>
+            <a:off x="1396208" y="362881"/>
             <a:ext cx="595313" cy="80962"/>
           </a:xfrm>
           <a:prstGeom prst="rect">
@@ -3561,7 +3401,7 @@
         </p:nvSpPr>
         <p:spPr>
           <a:xfrm>
-            <a:off x="483395" y="1145458"/>
+            <a:off x="483395" y="1104301"/>
             <a:ext cx="883443" cy="103584"/>
           </a:xfrm>
           <a:prstGeom prst="rect">
@@ -4582,6 +4422,124 @@
           </a:fontRef>
         </p:style>
       </p:cxnSp>
+      <p:sp>
+        <p:nvSpPr>
+          <p:cNvPr id="2" name="Rectangle 1">
+            <a:extLst>
+              <a:ext uri="{FF2B5EF4-FFF2-40B4-BE49-F238E27FC236}">
+                <a16:creationId xmlns:a16="http://schemas.microsoft.com/office/drawing/2014/main" id="{8F4D1F6A-C21C-D925-F627-B3A4DAF69925}"/>
+              </a:ext>
+            </a:extLst>
+          </p:cNvPr>
+          <p:cNvSpPr/>
+          <p:nvPr/>
+        </p:nvSpPr>
+        <p:spPr>
+          <a:xfrm>
+            <a:off x="1396208" y="487100"/>
+            <a:ext cx="595313" cy="80962"/>
+          </a:xfrm>
+          <a:prstGeom prst="rect">
+            <a:avLst/>
+          </a:prstGeom>
+          <a:noFill/>
+          <a:ln>
+            <a:noFill/>
+          </a:ln>
+        </p:spPr>
+        <p:style>
+          <a:lnRef idx="2">
+            <a:schemeClr val="accent1">
+              <a:shade val="15000"/>
+            </a:schemeClr>
+          </a:lnRef>
+          <a:fillRef idx="1">
+            <a:schemeClr val="accent1"/>
+          </a:fillRef>
+          <a:effectRef idx="0">
+            <a:schemeClr val="accent1"/>
+          </a:effectRef>
+          <a:fontRef idx="minor">
+            <a:schemeClr val="lt1"/>
+          </a:fontRef>
+        </p:style>
+        <p:txBody>
+          <a:bodyPr lIns="0" rIns="0" rtlCol="0" anchor="ctr"/>
+          <a:lstStyle/>
+          <a:p>
+            <a:pPr algn="ctr"/>
+            <a:r>
+              <a:rPr lang="en-US" sz="800" i="1" dirty="0">
+                <a:solidFill>
+                  <a:srgbClr val="0086A8"/>
+                </a:solidFill>
+                <a:latin typeface="Arial" panose="020B0604020202020204" pitchFamily="34" charset="0"/>
+                <a:cs typeface="Arial" panose="020B0604020202020204" pitchFamily="34" charset="0"/>
+              </a:rPr>
+              <a:t>p &lt; 0.01</a:t>
+            </a:r>
+          </a:p>
+        </p:txBody>
+      </p:sp>
+      <p:sp>
+        <p:nvSpPr>
+          <p:cNvPr id="3" name="Rectangle 2">
+            <a:extLst>
+              <a:ext uri="{FF2B5EF4-FFF2-40B4-BE49-F238E27FC236}">
+                <a16:creationId xmlns:a16="http://schemas.microsoft.com/office/drawing/2014/main" id="{D7CF51DF-0838-CE75-B163-8D2115511C37}"/>
+              </a:ext>
+            </a:extLst>
+          </p:cNvPr>
+          <p:cNvSpPr/>
+          <p:nvPr/>
+        </p:nvSpPr>
+        <p:spPr>
+          <a:xfrm>
+            <a:off x="566735" y="1225743"/>
+            <a:ext cx="595313" cy="80962"/>
+          </a:xfrm>
+          <a:prstGeom prst="rect">
+            <a:avLst/>
+          </a:prstGeom>
+          <a:noFill/>
+          <a:ln>
+            <a:noFill/>
+          </a:ln>
+        </p:spPr>
+        <p:style>
+          <a:lnRef idx="2">
+            <a:schemeClr val="accent1">
+              <a:shade val="15000"/>
+            </a:schemeClr>
+          </a:lnRef>
+          <a:fillRef idx="1">
+            <a:schemeClr val="accent1"/>
+          </a:fillRef>
+          <a:effectRef idx="0">
+            <a:schemeClr val="accent1"/>
+          </a:effectRef>
+          <a:fontRef idx="minor">
+            <a:schemeClr val="lt1"/>
+          </a:fontRef>
+        </p:style>
+        <p:txBody>
+          <a:bodyPr lIns="0" rIns="0" rtlCol="0" anchor="ctr"/>
+          <a:lstStyle/>
+          <a:p>
+            <a:pPr algn="ctr"/>
+            <a:r>
+              <a:rPr lang="en-US" sz="800" i="1" dirty="0">
+                <a:solidFill>
+                  <a:srgbClr val="D04E00"/>
+                </a:solidFill>
+                <a:latin typeface="Arial" panose="020B0604020202020204" pitchFamily="34" charset="0"/>
+                <a:cs typeface="Arial" panose="020B0604020202020204" pitchFamily="34" charset="0"/>
+              </a:rPr>
+              <a:t>p &lt; 0.01</a:t>
+            </a:r>
+          </a:p>
+        </p:txBody>
+      </p:sp>
     </p:spTree>
     <p:extLst>
       <p:ext uri="{BB962C8B-B14F-4D97-AF65-F5344CB8AC3E}">
